--- a/PPTX/TT_GROUP_10.pptx
+++ b/PPTX/TT_GROUP_10.pptx
@@ -5526,7 +5526,7 @@
       </p:sp>
       <p:pic>
         <p:nvPicPr>
-          <p:cNvPr id="7" name="Picture 6" descr="Result_FIFO"/>
+          <p:cNvPr id="8" name="Picture 7"/>
           <p:cNvPicPr>
             <a:picLocks noChangeAspect="1"/>
           </p:cNvPicPr>
@@ -5540,8 +5540,8 @@
         </p:blipFill>
         <p:spPr>
           <a:xfrm>
-            <a:off x="5960110" y="2174240"/>
-            <a:ext cx="6136005" cy="3487420"/>
+            <a:off x="5568950" y="2347595"/>
+            <a:ext cx="6623050" cy="3215640"/>
           </a:xfrm>
           <a:prstGeom prst="rect">
             <a:avLst/>
@@ -6046,7 +6046,7 @@
       </p:sp>
       <p:pic>
         <p:nvPicPr>
-          <p:cNvPr id="7" name="Picture 6" descr="Result_LRU"/>
+          <p:cNvPr id="8" name="Picture 7"/>
           <p:cNvPicPr>
             <a:picLocks noChangeAspect="1"/>
           </p:cNvPicPr>
@@ -6060,8 +6060,8 @@
         </p:blipFill>
         <p:spPr>
           <a:xfrm>
-            <a:off x="6452870" y="2174875"/>
-            <a:ext cx="5739130" cy="3485515"/>
+            <a:off x="6508115" y="2737485"/>
+            <a:ext cx="5546725" cy="2877185"/>
           </a:xfrm>
           <a:prstGeom prst="rect">
             <a:avLst/>
